--- a/WaterSound - Presentation.pptx
+++ b/WaterSound - Presentation.pptx
@@ -17973,7 +17973,18 @@
                 <a:ea typeface="Courier New" pitchFamily="34" charset="-122"/>
                 <a:cs typeface="Courier New" pitchFamily="34" charset="-120"/>
               </a:rPr>
-              <a:t>06</a:t>
+              <a:t>0</a:t>
+            </a:r>
+            <a:r>
+              <a:rPr lang="he-IL" sz="6600" b="1" dirty="0">
+                <a:solidFill>
+                  <a:srgbClr val="3C3526"/>
+                </a:solidFill>
+                <a:latin typeface="Courier New" pitchFamily="34" charset="0"/>
+                <a:ea typeface="Courier New" pitchFamily="34" charset="-122"/>
+                <a:cs typeface="Courier New" pitchFamily="34" charset="-120"/>
+              </a:rPr>
+              <a:t>7</a:t>
             </a:r>
             <a:endParaRPr lang="en-US" sz="6600" dirty="0"/>
           </a:p>
